--- a/decks/englit-gothic/englit-gothic_ch3_gothic-characters.pptx
+++ b/decks/englit-gothic/englit-gothic_ch3_gothic-characters.pptx
@@ -130,30 +130,30 @@
   <p:extLst>
     <p:ext uri="{521415D9-36F7-43E2-AB2F-B90AF26B5E84}">
       <p14:sectionLst xmlns:p14="http://schemas.microsoft.com/office/powerpoint/2010/main">
-        <p14:section name="Opening" id="{ce5bfb95-97ca-db6f-3869-a79d04cb13bf}">
+        <p14:section name="Opening" id="{2d4727fc-c1e6-29b5-49d7-293015acb54d}">
           <p14:sldIdLst>
             <p14:sldId id="256"/>
           </p14:sldIdLst>
         </p14:section>
-        <p14:section name="Gate" id="{02ab90fb-f369-b5df-2429-327654892ab4}">
+        <p14:section name="Gate" id="{bdde4b4c-e5d9-4d77-d36f-2e3bb5fa1ad7}">
           <p14:sldIdLst>
             <p14:sldId id="257"/>
             <p14:sldId id="258"/>
             <p14:sldId id="259"/>
           </p14:sldIdLst>
         </p14:section>
-        <p14:section name="Pre-teach" id="{d0f82553-9686-b65c-c752-924192c1fa6b}">
+        <p14:section name="Pre-teach" id="{6317ca83-179c-2b88-bfec-9fe6b35cb6e1}">
           <p14:sldIdLst>
             <p14:sldId id="260"/>
           </p14:sldIdLst>
         </p14:section>
-        <p14:section name="Read-along" id="{747796d4-cb20-5053-1823-9beeb363eb85}">
+        <p14:section name="Read-along" id="{4be851a7-cb0b-bfc0-f171-d9d260ee0415}">
           <p14:sldIdLst>
             <p14:sldId id="261"/>
             <p14:sldId id="262"/>
           </p14:sldIdLst>
         </p14:section>
-        <p14:section name="Teach" id="{e315dc7e-688f-3192-c0fb-98059c87b5f4}">
+        <p14:section name="Teach" id="{97b07276-2214-bb68-6f78-4bcf86eb4ffb}">
           <p14:sldIdLst>
             <p14:sldId id="263"/>
             <p14:sldId id="264"/>
@@ -161,7 +161,7 @@
             <p14:sldId id="266"/>
           </p14:sldIdLst>
         </p14:section>
-        <p14:section name="Routes" id="{ec0d1139-0d84-0a2e-2bfa-d9da3b2a8081}">
+        <p14:section name="Routes" id="{2f18d104-c02c-a037-251f-6ee19e9674bb}">
           <p14:sldIdLst>
             <p14:sldId id="267"/>
             <p14:sldId id="268"/>
@@ -173,12 +173,12 @@
             <p14:sldId id="274"/>
           </p14:sldIdLst>
         </p14:section>
-        <p14:section name="Close" id="{ec7f506f-f1ae-a360-fdd3-d23580731d05}">
+        <p14:section name="Close" id="{81c69749-388c-3dd8-2ee0-9f13eedfdce6}">
           <p14:sldIdLst>
             <p14:sldId id="275"/>
           </p14:sldIdLst>
         </p14:section>
-        <p14:section name="Answers" id="{345b32d3-02f8-4188-eee5-cb3045fb7899}">
+        <p14:section name="Answers" id="{75be6134-bf08-e16d-8c18-cbcfe01320ce}">
           <p14:sldIdLst>
             <p14:sldId id="276"/>
             <p14:sldId id="277"/>
@@ -1620,7 +1620,7 @@
             <a:r>
               <a:rPr lang="en-US" dirty="0"/>
               <a:t>Do now — retrieval. Silent, no notes, no help: recall comes before any support. Give about four minutes.
-1. Which set of traits describes a Byronic hero?  →  B   Rebellious, proud, troubled and set apart from society
+1. Which set of traits describes a Byronic hero?  →  D   Rebellious, proud, troubled and set apart from society
 2. A character whose name is the title of the book is called an ___ hero or villain.  →  eponymous
 3. Why does Count Dracula's appearance feel uncanny to Jonathan Harker?  →  B   He looks almost human, but small details are wrong, such as the hairs on his palms
 Circulate: who gets 3/3 (Stretch route), 2/3 (Core), 0–1 (Support)? Use this to route pupils later in the lesson.</a:t>
@@ -2172,7 +2172,7 @@
             <a:r>
               <a:rPr lang="en-US" dirty="0"/>
               <a:t>Do now — retrieval. Silent, no notes, no help: recall comes before any support. Give about four minutes.
-1. Which set of traits describes a Byronic hero?  →  B   Rebellious, proud, troubled and set apart from society
+1. Which set of traits describes a Byronic hero?  →  D   Rebellious, proud, troubled and set apart from society
 2. A character whose name is the title of the book is called an ___ hero or villain.  →  eponymous
 3. Why does Count Dracula's appearance feel uncanny to Jonathan Harker?  →  B   He looks almost human, but small details are wrong, such as the hairs on his palms
 Circulate: who gets 3/3 (Stretch route), 2/3 (Core), 0–1 (Support)? Use this to route pupils later in the lesson.</a:t>
@@ -2264,7 +2264,7 @@
             <a:r>
               <a:rPr lang="en-US" dirty="0"/>
               <a:t>Answers — pupils mark their own in a different colour, then hands up for 3/3, 2/3, 1/3.
-1. B   Rebellious, proud, troubled and set apart from society. The Byronic hero is an antihero named after Lord Byron: rebellious, arrogant, anti-social or exiled, and tortured by inner turmoil.
+1. D   Rebellious, proud, troubled and set apart from society. The Byronic hero is an antihero named after Lord Byron: rebellious, arrogant, anti-social or exiled, and tortured by inner turmoil.
 2. eponymous. Eponymous means giving your name to something. Macbeth, Othello and Dracula are all eponymous characters.
 3. B   He looks almost human, but small details are wrong, such as the hairs on his palms. The uncanny is the familiar made strange. Dracula has a nobleman's face, but pointed ears, sharp protruding teeth, hairy palms and pointed nails.
 Say the route each score points to: 3/3 Stretch, 2/3 Core, 0–1 Support. Pupils may choose to move up.</a:t>
@@ -11355,7 +11355,7 @@
                 <a:ea typeface="Calibri" pitchFamily="34" charset="-122"/>
                 <a:cs typeface="Calibri" pitchFamily="34" charset="-120"/>
               </a:rPr>
-              <a:t>Cheerful, sociable and easy to understand</a:t>
+              <a:t>Loyal, obedient and respectful of authority</a:t>
             </a:r>
             <a:endParaRPr lang="en-US" sz="2200" dirty="0"/>
           </a:p>
@@ -11392,7 +11392,7 @@
                 <a:ea typeface="Calibri" pitchFamily="34" charset="-122"/>
                 <a:cs typeface="Calibri" pitchFamily="34" charset="-120"/>
               </a:rPr>
-              <a:t>Rebellious, proud, troubled and set apart from society</a:t>
+              <a:t>Cheerful, sociable and easy to understand</a:t>
             </a:r>
             <a:endParaRPr lang="en-US" sz="2200" dirty="0"/>
           </a:p>
@@ -11466,7 +11466,7 @@
                 <a:ea typeface="Calibri" pitchFamily="34" charset="-122"/>
                 <a:cs typeface="Calibri" pitchFamily="34" charset="-120"/>
               </a:rPr>
-              <a:t>Loyal, obedient and respectful of authority</a:t>
+              <a:t>Rebellious, proud, troubled and set apart from society</a:t>
             </a:r>
             <a:endParaRPr lang="en-US" sz="2200" dirty="0"/>
           </a:p>
@@ -12040,7 +12040,7 @@
                 <a:ea typeface="Calibri" pitchFamily="34" charset="-122"/>
                 <a:cs typeface="Calibri" pitchFamily="34" charset="-120"/>
               </a:rPr>
-              <a:t>The count was a very dangerous and frightening man.</a:t>
+              <a:t>The count was evil and did many terrible things.</a:t>
             </a:r>
             <a:endParaRPr lang="en-US" sz="2400" dirty="0"/>
           </a:p>
@@ -12151,7 +12151,7 @@
                 <a:ea typeface="Calibri" pitchFamily="34" charset="-122"/>
                 <a:cs typeface="Calibri" pitchFamily="34" charset="-120"/>
               </a:rPr>
-              <a:t>The count was evil and did many terrible things.</a:t>
+              <a:t>The count was a very dangerous and frightening man.</a:t>
             </a:r>
             <a:endParaRPr lang="en-US" sz="2400" dirty="0"/>
           </a:p>
@@ -14695,7 +14695,7 @@
                 <a:ea typeface="Calibri" pitchFamily="34" charset="-122"/>
                 <a:cs typeface="Calibri" pitchFamily="34" charset="-120"/>
               </a:rPr>
-              <a:t>He looks nothing like a human being</a:t>
+              <a:t>He is invisible except for his eyes</a:t>
             </a:r>
             <a:endParaRPr lang="en-US" sz="2400" dirty="0"/>
           </a:p>
@@ -14769,7 +14769,7 @@
                 <a:ea typeface="Calibri" pitchFamily="34" charset="-122"/>
                 <a:cs typeface="Calibri" pitchFamily="34" charset="-120"/>
               </a:rPr>
-              <a:t>He is invisible except for his eyes</a:t>
+              <a:t>He wears a mask that hides his face</a:t>
             </a:r>
             <a:endParaRPr lang="en-US" sz="2400" dirty="0"/>
           </a:p>
@@ -14806,7 +14806,7 @@
                 <a:ea typeface="Calibri" pitchFamily="34" charset="-122"/>
                 <a:cs typeface="Calibri" pitchFamily="34" charset="-120"/>
               </a:rPr>
-              <a:t>He wears a mask that hides his face</a:t>
+              <a:t>He looks nothing like a human being</a:t>
             </a:r>
             <a:endParaRPr lang="en-US" sz="2400" dirty="0"/>
           </a:p>
@@ -15207,7 +15207,7 @@
                 <a:ea typeface="Calibri" pitchFamily="34" charset="-122"/>
                 <a:cs typeface="Calibri" pitchFamily="34" charset="-120"/>
               </a:rPr>
-              <a:t>B   Rebellious, proud, troubled and set apart from society</a:t>
+              <a:t>D   Rebellious, proud, troubled and set apart from society</a:t>
             </a:r>
             <a:endParaRPr lang="en-US" sz="2200" dirty="0"/>
           </a:p>

--- a/decks/englit-gothic/englit-gothic_ch3_gothic-characters.pptx
+++ b/decks/englit-gothic/englit-gothic_ch3_gothic-characters.pptx
@@ -130,30 +130,30 @@
   <p:extLst>
     <p:ext uri="{521415D9-36F7-43E2-AB2F-B90AF26B5E84}">
       <p14:sectionLst xmlns:p14="http://schemas.microsoft.com/office/powerpoint/2010/main">
-        <p14:section name="Opening" id="{2d4727fc-c1e6-29b5-49d7-293015acb54d}">
+        <p14:section name="Opening" id="{3c2b5e7a-4eb1-c87d-4036-a8c33f085805}">
           <p14:sldIdLst>
             <p14:sldId id="256"/>
           </p14:sldIdLst>
         </p14:section>
-        <p14:section name="Gate" id="{bdde4b4c-e5d9-4d77-d36f-2e3bb5fa1ad7}">
+        <p14:section name="Gate" id="{83a484d8-b6b9-d374-9eef-aac80d299bbb}">
           <p14:sldIdLst>
             <p14:sldId id="257"/>
             <p14:sldId id="258"/>
             <p14:sldId id="259"/>
           </p14:sldIdLst>
         </p14:section>
-        <p14:section name="Pre-teach" id="{6317ca83-179c-2b88-bfec-9fe6b35cb6e1}">
+        <p14:section name="Pre-teach" id="{d49c3555-871a-7131-66a0-d46b7bc4beab}">
           <p14:sldIdLst>
             <p14:sldId id="260"/>
           </p14:sldIdLst>
         </p14:section>
-        <p14:section name="Read-along" id="{4be851a7-cb0b-bfc0-f171-d9d260ee0415}">
+        <p14:section name="Read-along" id="{50913e2c-aa02-d08b-e7f5-4daeb6dd2ae5}">
           <p14:sldIdLst>
             <p14:sldId id="261"/>
             <p14:sldId id="262"/>
           </p14:sldIdLst>
         </p14:section>
-        <p14:section name="Teach" id="{97b07276-2214-bb68-6f78-4bcf86eb4ffb}">
+        <p14:section name="Teach" id="{f3207b85-1a21-e517-4b4f-6933df75ad45}">
           <p14:sldIdLst>
             <p14:sldId id="263"/>
             <p14:sldId id="264"/>
@@ -161,7 +161,7 @@
             <p14:sldId id="266"/>
           </p14:sldIdLst>
         </p14:section>
-        <p14:section name="Routes" id="{2f18d104-c02c-a037-251f-6ee19e9674bb}">
+        <p14:section name="Routes" id="{b1739dd8-b2e3-7eb9-2a56-8f257eebc190}">
           <p14:sldIdLst>
             <p14:sldId id="267"/>
             <p14:sldId id="268"/>
@@ -173,12 +173,12 @@
             <p14:sldId id="274"/>
           </p14:sldIdLst>
         </p14:section>
-        <p14:section name="Close" id="{81c69749-388c-3dd8-2ee0-9f13eedfdce6}">
+        <p14:section name="Close" id="{c455c9bc-b22e-7d7c-6a9a-05a9d0a60ce8}">
           <p14:sldIdLst>
             <p14:sldId id="275"/>
           </p14:sldIdLst>
         </p14:section>
-        <p14:section name="Answers" id="{75be6134-bf08-e16d-8c18-cbcfe01320ce}">
+        <p14:section name="Answers" id="{5e8ec016-33af-088e-77aa-aba1c8dd9557}">
           <p14:sldIdLst>
             <p14:sldId id="276"/>
             <p14:sldId id="277"/>
